--- a/Materials/1550-1600_Morioka/tidyverse in 10 minutes.pptx
+++ b/Materials/1550-1600_Morioka/tidyverse in 10 minutes.pptx
@@ -12682,7 +12682,7 @@
             </a:r>
             <a:r>
               <a:rPr lang="en-US" altLang="ja-JP" b="1" dirty="0" err="1"/>
-              <a:t>data.frae</a:t>
+              <a:t>data.frame</a:t>
             </a:r>
             <a:r>
               <a:rPr lang="ja-JP" altLang="en-US" b="1" dirty="0"/>
@@ -14899,11 +14899,7 @@
             </a:r>
             <a:r>
               <a:rPr lang="en-US" altLang="ja-JP" sz="1800" dirty="0"/>
-              <a:t>proc </a:t>
-            </a:r>
-            <a:r>
-              <a:rPr lang="en-US" altLang="ja-JP" sz="1800" dirty="0" err="1"/>
-              <a:t>tanspose</a:t>
+              <a:t>proc transpose</a:t>
             </a:r>
             <a:endParaRPr lang="ja-JP" altLang="en-US" sz="1800" dirty="0"/>
           </a:p>
